--- a/docs/RCMES-MCP_Introduction.pptx
+++ b/docs/RCMES-MCP_Introduction.pptx
@@ -29,6 +29,11 @@
     <p:sldId id="269" r:id="rId24"/>
     <p:sldId id="270" r:id="rId25"/>
     <p:sldId id="271" r:id="rId26"/>
+    <p:sldId id="272" r:id="rId27"/>
+    <p:sldId id="273" r:id="rId28"/>
+    <p:sldId id="274" r:id="rId29"/>
+    <p:sldId id="275" r:id="rId30"/>
+    <p:sldId id="276" r:id="rId31"/>
   </p:sldIdLst>
   <p:sldSz cx="9144000" cy="5143500" type="screen16x9"/>
   <p:notesSz cx="6858000" cy="9144000"/>
@@ -17383,61 +17388,31 @@
           <a:lstStyle/>
           <a:p>
             <a:r>
-              <a:t>Current Status</a:t>
-            </a:r>
-          </a:p>
-        </p:txBody>
-      </p:sp>
-      <p:sp>
-        <p:nvSpPr>
-          <p:cNvPr id="4" name="Text Placeholder 3"/>
-          <p:cNvSpPr>
-            <a:spLocks noGrp="1"/>
-          </p:cNvSpPr>
-          <p:nvPr>
-            <p:ph type="body" idx="14" sz="quarter"/>
+              <a:t>Ensemble Weighting — Beyond Equal Votes</a:t>
+            </a:r>
+          </a:p>
+        </p:txBody>
+      </p:sp>
+      <p:sp>
+        <p:nvSpPr>
+          <p:cNvPr id="4" name="Content Placeholder 3"/>
+          <p:cNvSpPr>
+            <a:spLocks noGrp="1"/>
+          </p:cNvSpPr>
+          <p:nvPr>
+            <p:ph idx="19" sz="quarter"/>
           </p:nvPr>
         </p:nvSpPr>
         <p:spPr/>
         <p:txBody>
           <a:bodyPr/>
           <a:lstStyle/>
-          <a:p/>
-        </p:txBody>
-      </p:sp>
-      <p:sp>
-        <p:nvSpPr>
-          <p:cNvPr id="5" name="Content Placeholder 4"/>
-          <p:cNvSpPr>
-            <a:spLocks noGrp="1"/>
-          </p:cNvSpPr>
-          <p:nvPr>
-            <p:ph idx="19" sz="quarter"/>
-          </p:nvPr>
-        </p:nvSpPr>
-        <p:spPr/>
-        <p:txBody>
-          <a:bodyPr/>
-          <a:lstStyle/>
-          <a:p>
-            <a:pPr>
-              <a:defRPr sz="1400" b="1">
-                <a:solidFill>
-                  <a:srgbClr val="00325B"/>
-                </a:solidFill>
-                <a:latin typeface="Arial"/>
-              </a:defRPr>
-            </a:pPr>
-            <a:r>
-              <a:t>Accomplishments</a:t>
-            </a:r>
-          </a:p>
           <a:p>
             <a:pPr>
               <a:spcAft>
-                <a:spcPts val="300"/>
+                <a:spcPts val="600"/>
               </a:spcAft>
-              <a:defRPr sz="1100">
+              <a:defRPr sz="1300">
                 <a:solidFill>
                   <a:srgbClr val="333333"/>
                 </a:solidFill>
@@ -17445,15 +17420,15 @@
               </a:defRPr>
             </a:pPr>
             <a:r>
-              <a:t>32+ MCP tools: full climate analysis pipeline</a:t>
+              <a:t>Default IPCC ensemble averaging treats every model as equally credible — but CMIP6 has lots of shared lineage (e.g., CESM2 ↔ NorESM2 share atmosphere)</a:t>
             </a:r>
           </a:p>
           <a:p>
             <a:pPr>
               <a:spcAft>
-                <a:spcPts val="300"/>
+                <a:spcPts val="600"/>
               </a:spcAft>
-              <a:defRPr sz="1100">
+              <a:defRPr sz="1300">
                 <a:solidFill>
                   <a:srgbClr val="333333"/>
                 </a:solidFill>
@@ -17461,15 +17436,15 @@
               </a:defRPr>
             </a:pPr>
             <a:r>
-              <a:t>Operational 38 TB data access via AWS S3</a:t>
+              <a:t>Four schemes implemented (Knutti et al. 2017; Brunner &amp; Knutti 2020):  (1) Equal — democratic baseline;  (2) Skill — w ∝ exp(−RMSE² / σ²) against reference observations;  (3) Independence — penalise pairs of models with low inter-model RMSE;  (4) Combined — skill × independence, AR6 operational style</a:t>
             </a:r>
           </a:p>
           <a:p>
             <a:pPr>
               <a:spcAft>
-                <a:spcPts val="300"/>
+                <a:spcPts val="600"/>
               </a:spcAft>
-              <a:defRPr sz="1100">
+              <a:defRPr sz="1300">
                 <a:solidFill>
                   <a:srgbClr val="333333"/>
                 </a:solidFill>
@@ -17477,15 +17452,15 @@
               </a:defRPr>
             </a:pPr>
             <a:r>
-              <a:t>22 ETCCDI extreme climate indices</a:t>
+              <a:t>load_reference_dataset → calculate_model_weights → apply_ensemble_weights → weighted projections; validate_ensemble_weighting splits time into train/test to score generalization against held-out observations</a:t>
             </a:r>
           </a:p>
           <a:p>
             <a:pPr>
               <a:spcAft>
-                <a:spcPts val="300"/>
+                <a:spcPts val="600"/>
               </a:spcAft>
-              <a:defRPr sz="1100">
+              <a:defRPr sz="1300">
                 <a:solidFill>
                   <a:srgbClr val="333333"/>
                 </a:solidFill>
@@ -17493,259 +17468,7 @@
               </a:defRPr>
             </a:pPr>
             <a:r>
-              <a:t>Interactive web UI (React + FastAPI)</a:t>
-            </a:r>
-          </a:p>
-          <a:p>
-            <a:pPr>
-              <a:spcAft>
-                <a:spcPts val="300"/>
-              </a:spcAft>
-              <a:defRPr sz="1100">
-                <a:solidFill>
-                  <a:srgbClr val="333333"/>
-                </a:solidFill>
-                <a:latin typeface="Arial"/>
-              </a:defRPr>
-            </a:pPr>
-            <a:r>
-              <a:t>Multiple deployment modes (MCP, Web, API, Docker)</a:t>
-            </a:r>
-          </a:p>
-          <a:p>
-            <a:pPr>
-              <a:spcAft>
-                <a:spcPts val="300"/>
-              </a:spcAft>
-              <a:defRPr sz="1100">
-                <a:solidFill>
-                  <a:srgbClr val="333333"/>
-                </a:solidFill>
-                <a:latin typeface="Arial"/>
-              </a:defRPr>
-            </a:pPr>
-            <a:r>
-              <a:t>Session management with chainable operations</a:t>
-            </a:r>
-          </a:p>
-          <a:p>
-            <a:pPr>
-              <a:spcAft>
-                <a:spcPts val="300"/>
-              </a:spcAft>
-              <a:defRPr sz="1100">
-                <a:solidFill>
-                  <a:srgbClr val="333333"/>
-                </a:solidFill>
-                <a:latin typeface="Arial"/>
-              </a:defRPr>
-            </a:pPr>
-            <a:r>
-              <a:t>Country-level masking &amp; geographic selection</a:t>
-            </a:r>
-          </a:p>
-        </p:txBody>
-      </p:sp>
-      <p:sp>
-        <p:nvSpPr>
-          <p:cNvPr id="6" name="Content Placeholder 5"/>
-          <p:cNvSpPr>
-            <a:spLocks noGrp="1"/>
-          </p:cNvSpPr>
-          <p:nvPr>
-            <p:ph idx="20" sz="quarter"/>
-          </p:nvPr>
-        </p:nvSpPr>
-        <p:spPr/>
-        <p:txBody>
-          <a:bodyPr/>
-          <a:lstStyle/>
-          <a:p>
-            <a:pPr>
-              <a:defRPr sz="1400" b="1">
-                <a:solidFill>
-                  <a:srgbClr val="00325B"/>
-                </a:solidFill>
-                <a:latin typeface="Arial"/>
-              </a:defRPr>
-            </a:pPr>
-            <a:r>
-              <a:t>Technology Stack</a:t>
-            </a:r>
-          </a:p>
-          <a:p>
-            <a:pPr>
-              <a:spcAft>
-                <a:spcPts val="300"/>
-              </a:spcAft>
-            </a:pPr>
-            <a:r>
-              <a:rPr sz="1100" b="1">
-                <a:solidFill>
-                  <a:srgbClr val="007DBA"/>
-                </a:solidFill>
-                <a:latin typeface="Arial"/>
-              </a:rPr>
-              <a:t>Core: </a:t>
-            </a:r>
-            <a:r>
-              <a:rPr sz="1100">
-                <a:solidFill>
-                  <a:srgbClr val="333333"/>
-                </a:solidFill>
-                <a:latin typeface="Arial"/>
-              </a:rPr>
-              <a:t>Python 3.10+, xarray, Dask, zarr</a:t>
-            </a:r>
-          </a:p>
-          <a:p>
-            <a:pPr>
-              <a:spcAft>
-                <a:spcPts val="300"/>
-              </a:spcAft>
-            </a:pPr>
-            <a:r>
-              <a:rPr sz="1100" b="1">
-                <a:solidFill>
-                  <a:srgbClr val="007DBA"/>
-                </a:solidFill>
-                <a:latin typeface="Arial"/>
-              </a:rPr>
-              <a:t>Climate: </a:t>
-            </a:r>
-            <a:r>
-              <a:rPr sz="1100">
-                <a:solidFill>
-                  <a:srgbClr val="333333"/>
-                </a:solidFill>
-                <a:latin typeface="Arial"/>
-              </a:rPr>
-              <a:t>xclim, SciPy, NetCDF4</a:t>
-            </a:r>
-          </a:p>
-          <a:p>
-            <a:pPr>
-              <a:spcAft>
-                <a:spcPts val="300"/>
-              </a:spcAft>
-            </a:pPr>
-            <a:r>
-              <a:rPr sz="1100" b="1">
-                <a:solidFill>
-                  <a:srgbClr val="007DBA"/>
-                </a:solidFill>
-                <a:latin typeface="Arial"/>
-              </a:rPr>
-              <a:t>Geospatial: </a:t>
-            </a:r>
-            <a:r>
-              <a:rPr sz="1100">
-                <a:solidFill>
-                  <a:srgbClr val="333333"/>
-                </a:solidFill>
-                <a:latin typeface="Arial"/>
-              </a:rPr>
-              <a:t>Shapely, GeoPandas, Cartopy</a:t>
-            </a:r>
-          </a:p>
-          <a:p>
-            <a:pPr>
-              <a:spcAft>
-                <a:spcPts val="300"/>
-              </a:spcAft>
-            </a:pPr>
-            <a:r>
-              <a:rPr sz="1100" b="1">
-                <a:solidFill>
-                  <a:srgbClr val="007DBA"/>
-                </a:solidFill>
-                <a:latin typeface="Arial"/>
-              </a:rPr>
-              <a:t>Server: </a:t>
-            </a:r>
-            <a:r>
-              <a:rPr sz="1100">
-                <a:solidFill>
-                  <a:srgbClr val="333333"/>
-                </a:solidFill>
-                <a:latin typeface="Arial"/>
-              </a:rPr>
-              <a:t>FastMCP, FastAPI, Uvicorn</a:t>
-            </a:r>
-          </a:p>
-          <a:p>
-            <a:pPr>
-              <a:spcAft>
-                <a:spcPts val="300"/>
-              </a:spcAft>
-            </a:pPr>
-            <a:r>
-              <a:rPr sz="1100" b="1">
-                <a:solidFill>
-                  <a:srgbClr val="007DBA"/>
-                </a:solidFill>
-                <a:latin typeface="Arial"/>
-              </a:rPr>
-              <a:t>Frontend: </a:t>
-            </a:r>
-            <a:r>
-              <a:rPr sz="1100">
-                <a:solidFill>
-                  <a:srgbClr val="333333"/>
-                </a:solidFill>
-                <a:latin typeface="Arial"/>
-              </a:rPr>
-              <a:t>React, TypeScript</a:t>
-            </a:r>
-          </a:p>
-          <a:p>
-            <a:pPr>
-              <a:spcAft>
-                <a:spcPts val="300"/>
-              </a:spcAft>
-            </a:pPr>
-            <a:r>
-              <a:rPr sz="1100" b="1">
-                <a:solidFill>
-                  <a:srgbClr val="007DBA"/>
-                </a:solidFill>
-                <a:latin typeface="Arial"/>
-              </a:rPr>
-              <a:t>Data: </a:t>
-            </a:r>
-            <a:r>
-              <a:rPr sz="1100">
-                <a:solidFill>
-                  <a:srgbClr val="333333"/>
-                </a:solidFill>
-                <a:latin typeface="Arial"/>
-              </a:rPr>
-              <a:t>AWS S3, NEX-GDDP-CMIP6</a:t>
-            </a:r>
-          </a:p>
-          <a:p>
-            <a:pPr>
-              <a:spcAft>
-                <a:spcPts val="300"/>
-              </a:spcAft>
-            </a:pPr>
-            <a:r>
-              <a:rPr sz="1100" b="1">
-                <a:solidFill>
-                  <a:srgbClr val="007DBA"/>
-                </a:solidFill>
-                <a:latin typeface="Arial"/>
-              </a:rPr>
-              <a:t>AI: </a:t>
-            </a:r>
-            <a:r>
-              <a:rPr sz="1100">
-                <a:solidFill>
-                  <a:srgbClr val="333333"/>
-                </a:solidFill>
-                <a:latin typeface="Arial"/>
-              </a:rPr>
-              <a:t>MCP Protocol, Azure OpenAI</a:t>
+              <a:t>Active collaboration with Elias Massound and Arielle on ensemble calibration paper</a:t>
             </a:r>
           </a:p>
         </p:txBody>
@@ -17805,61 +17528,62 @@
           <a:lstStyle/>
           <a:p>
             <a:r>
-              <a:t>Path Forward &amp; Continued Support</a:t>
-            </a:r>
-          </a:p>
-        </p:txBody>
-      </p:sp>
-      <p:sp>
-        <p:nvSpPr>
-          <p:cNvPr id="4" name="Text Placeholder 3"/>
-          <p:cNvSpPr>
-            <a:spLocks noGrp="1"/>
-          </p:cNvSpPr>
-          <p:nvPr>
-            <p:ph type="body" idx="14" sz="quarter"/>
-          </p:nvPr>
-        </p:nvSpPr>
-        <p:spPr/>
-        <p:txBody>
-          <a:bodyPr/>
-          <a:lstStyle/>
-          <a:p/>
-        </p:txBody>
-      </p:sp>
-      <p:sp>
-        <p:nvSpPr>
-          <p:cNvPr id="5" name="Content Placeholder 4"/>
-          <p:cNvSpPr>
-            <a:spLocks noGrp="1"/>
-          </p:cNvSpPr>
-          <p:nvPr>
-            <p:ph idx="19" sz="quarter"/>
-          </p:nvPr>
-        </p:nvSpPr>
-        <p:spPr/>
-        <p:txBody>
-          <a:bodyPr/>
-          <a:lstStyle/>
-          <a:p>
-            <a:pPr>
-              <a:defRPr sz="1400" b="1">
-                <a:solidFill>
-                  <a:srgbClr val="00325B"/>
-                </a:solidFill>
-                <a:latin typeface="Arial"/>
-              </a:defRPr>
-            </a:pPr>
-            <a:r>
-              <a:t>Growth Opportunities</a:t>
-            </a:r>
-          </a:p>
+              <a:t>Validating Weighting Schemes Against NCEP Reanalysis</a:t>
+            </a:r>
+          </a:p>
+        </p:txBody>
+      </p:sp>
+      <p:pic>
+        <p:nvPicPr>
+          <p:cNvPr id="4" name="Picture 3" descr="fig_weighting_validation.png"/>
+          <p:cNvPicPr>
+            <a:picLocks noChangeAspect="1"/>
+          </p:cNvPicPr>
+          <p:nvPr/>
+        </p:nvPicPr>
+        <p:blipFill>
+          <a:blip r:embed="rId2"/>
+          <a:stretch>
+            <a:fillRect/>
+          </a:stretch>
+        </p:blipFill>
+        <p:spPr>
+          <a:xfrm>
+            <a:off x="320040" y="1417320"/>
+            <a:ext cx="6949440" cy="2838054"/>
+          </a:xfrm>
+          <a:prstGeom prst="rect">
+            <a:avLst/>
+          </a:prstGeom>
+        </p:spPr>
+      </p:pic>
+      <p:sp>
+        <p:nvSpPr>
+          <p:cNvPr id="5" name="TextBox 4"/>
+          <p:cNvSpPr txBox="1"/>
+          <p:nvPr/>
+        </p:nvSpPr>
+        <p:spPr>
+          <a:xfrm>
+            <a:off x="7498079" y="1417320"/>
+            <a:ext cx="4434840" cy="4937760"/>
+          </a:xfrm>
+          <a:prstGeom prst="rect">
+            <a:avLst/>
+          </a:prstGeom>
+          <a:noFill/>
+        </p:spPr>
+        <p:txBody>
+          <a:bodyPr wrap="square">
+            <a:spAutoFit/>
+          </a:bodyPr>
+          <a:lstStyle/>
           <a:p>
             <a:pPr>
               <a:spcAft>
-                <a:spcPts val="300"/>
+                <a:spcPts val="800"/>
               </a:spcAft>
-              <a:defRPr sz="1100">
+              <a:defRPr sz="1300">
                 <a:solidFill>
                   <a:srgbClr val="333333"/>
                 </a:solidFill>
@@ -17867,15 +17591,15 @@
               </a:defRPr>
             </a:pPr>
             <a:r>
-              <a:t>Expand to additional NASA datasets (MERRA-2, ECCO, GLDAS)</a:t>
+              <a:t>validate_ensemble_weighting trains each scheme on 1980–2002 historical and scores it on the held-out 2003–2014 window against NCEP/NCAR Reanalysis 1</a:t>
             </a:r>
           </a:p>
           <a:p>
             <a:pPr>
               <a:spcAft>
-                <a:spcPts val="300"/>
+                <a:spcPts val="800"/>
               </a:spcAft>
-              <a:defRPr sz="1100">
+              <a:defRPr sz="1300">
                 <a:solidFill>
                   <a:srgbClr val="333333"/>
                 </a:solidFill>
@@ -17883,15 +17607,15 @@
               </a:defRPr>
             </a:pPr>
             <a:r>
-              <a:t>Model evaluation with observational datasets</a:t>
+              <a:t>Left: regional-mean RMSE (lower = better); right: Pearson correlation of monthly anomalies (higher = better)</a:t>
             </a:r>
           </a:p>
           <a:p>
             <a:pPr>
               <a:spcAft>
-                <a:spcPts val="300"/>
+                <a:spcPts val="800"/>
               </a:spcAft>
-              <a:defRPr sz="1100">
+              <a:defRPr sz="1300">
                 <a:solidFill>
                   <a:srgbClr val="333333"/>
                 </a:solidFill>
@@ -17899,15 +17623,15 @@
               </a:defRPr>
             </a:pPr>
             <a:r>
-              <a:t>NASA Earthdata integration for authenticated access</a:t>
+              <a:t>Skill-aware schemes typically beat the equal vote when one model substantially outperforms peers on the regional climatology</a:t>
             </a:r>
           </a:p>
           <a:p>
             <a:pPr>
               <a:spcAft>
-                <a:spcPts val="300"/>
+                <a:spcPts val="800"/>
               </a:spcAft>
-              <a:defRPr sz="1100">
+              <a:defRPr sz="1300">
                 <a:solidFill>
                   <a:srgbClr val="333333"/>
                 </a:solidFill>
@@ -17915,164 +17639,7 @@
               </a:defRPr>
             </a:pPr>
             <a:r>
-              <a:t>Multi-model ensemble analysis &amp; weighting</a:t>
-            </a:r>
-          </a:p>
-          <a:p>
-            <a:pPr>
-              <a:spcAft>
-                <a:spcPts val="300"/>
-              </a:spcAft>
-              <a:defRPr sz="1100">
-                <a:solidFill>
-                  <a:srgbClr val="333333"/>
-                </a:solidFill>
-                <a:latin typeface="Arial"/>
-              </a:defRPr>
-            </a:pPr>
-            <a:r>
-              <a:t>Community tool for broader climate science use</a:t>
-            </a:r>
-          </a:p>
-          <a:p>
-            <a:pPr>
-              <a:spcAft>
-                <a:spcPts val="300"/>
-              </a:spcAft>
-              <a:defRPr sz="1100">
-                <a:solidFill>
-                  <a:srgbClr val="333333"/>
-                </a:solidFill>
-                <a:latin typeface="Arial"/>
-              </a:defRPr>
-            </a:pPr>
-            <a:r>
-              <a:t>Reproducible climate assessments for policy support</a:t>
-            </a:r>
-          </a:p>
-        </p:txBody>
-      </p:sp>
-      <p:sp>
-        <p:nvSpPr>
-          <p:cNvPr id="6" name="Content Placeholder 5"/>
-          <p:cNvSpPr>
-            <a:spLocks noGrp="1"/>
-          </p:cNvSpPr>
-          <p:nvPr>
-            <p:ph idx="20" sz="quarter"/>
-          </p:nvPr>
-        </p:nvSpPr>
-        <p:spPr/>
-        <p:txBody>
-          <a:bodyPr/>
-          <a:lstStyle/>
-          <a:p>
-            <a:pPr>
-              <a:defRPr sz="1400" b="1">
-                <a:solidFill>
-                  <a:srgbClr val="00325B"/>
-                </a:solidFill>
-                <a:latin typeface="Arial"/>
-              </a:defRPr>
-            </a:pPr>
-            <a:r>
-              <a:t>What Continued Support Enables</a:t>
-            </a:r>
-          </a:p>
-          <a:p>
-            <a:pPr>
-              <a:spcAft>
-                <a:spcPts val="300"/>
-              </a:spcAft>
-              <a:defRPr sz="1100">
-                <a:solidFill>
-                  <a:srgbClr val="333333"/>
-                </a:solidFill>
-                <a:latin typeface="Arial"/>
-              </a:defRPr>
-            </a:pPr>
-            <a:r>
-              <a:t>Democratize access to NASA climate data for non-experts</a:t>
-            </a:r>
-          </a:p>
-          <a:p>
-            <a:pPr>
-              <a:spcAft>
-                <a:spcPts val="300"/>
-              </a:spcAft>
-              <a:defRPr sz="1100">
-                <a:solidFill>
-                  <a:srgbClr val="333333"/>
-                </a:solidFill>
-                <a:latin typeface="Arial"/>
-              </a:defRPr>
-            </a:pPr>
-            <a:r>
-              <a:t>Accelerate climate research by removing data engineering bottlenecks</a:t>
-            </a:r>
-          </a:p>
-          <a:p>
-            <a:pPr>
-              <a:spcAft>
-                <a:spcPts val="300"/>
-              </a:spcAft>
-              <a:defRPr sz="1100">
-                <a:solidFill>
-                  <a:srgbClr val="333333"/>
-                </a:solidFill>
-                <a:latin typeface="Arial"/>
-              </a:defRPr>
-            </a:pPr>
-            <a:r>
-              <a:t>Enable rapid AI-assisted climate impact assessments</a:t>
-            </a:r>
-          </a:p>
-          <a:p>
-            <a:pPr>
-              <a:spcAft>
-                <a:spcPts val="300"/>
-              </a:spcAft>
-              <a:defRPr sz="1100">
-                <a:solidFill>
-                  <a:srgbClr val="333333"/>
-                </a:solidFill>
-                <a:latin typeface="Arial"/>
-              </a:defRPr>
-            </a:pPr>
-            <a:r>
-              <a:t>Lower the barrier to entry across disciplines</a:t>
-            </a:r>
-          </a:p>
-          <a:p>
-            <a:pPr>
-              <a:spcAft>
-                <a:spcPts val="300"/>
-              </a:spcAft>
-              <a:defRPr sz="1100">
-                <a:solidFill>
-                  <a:srgbClr val="333333"/>
-                </a:solidFill>
-                <a:latin typeface="Arial"/>
-              </a:defRPr>
-            </a:pPr>
-            <a:r>
-              <a:t>Position NASA JPL at the forefront of AI-enabled science</a:t>
-            </a:r>
-          </a:p>
-          <a:p>
-            <a:pPr>
-              <a:spcAft>
-                <a:spcPts val="300"/>
-              </a:spcAft>
-              <a:defRPr sz="1100">
-                <a:solidFill>
-                  <a:srgbClr val="333333"/>
-                </a:solidFill>
-                <a:latin typeface="Arial"/>
-              </a:defRPr>
-            </a:pPr>
-            <a:r>
-              <a:t>Support decision-makers with actionable climate intelligence</a:t>
+              <a:t>Honest framing: only 3 models in this demo — the methodology generalizes to the full 35-model NEX-GDDP-CMIP6 set</a:t>
             </a:r>
           </a:p>
         </p:txBody>
@@ -18095,6 +17662,923 @@
         <p:nvPr/>
       </p:nvGrpSpPr>
       <p:grpSpPr/>
+      <p:sp>
+        <p:nvSpPr>
+          <p:cNvPr id="2" name="Text Placeholder 1"/>
+          <p:cNvSpPr>
+            <a:spLocks noGrp="1"/>
+          </p:cNvSpPr>
+          <p:nvPr>
+            <p:ph type="body" idx="17" sz="quarter"/>
+          </p:nvPr>
+        </p:nvSpPr>
+        <p:spPr/>
+        <p:txBody>
+          <a:bodyPr/>
+          <a:lstStyle/>
+          <a:p>
+            <a:r>
+              <a:t>RCMES-MCP</a:t>
+            </a:r>
+          </a:p>
+        </p:txBody>
+      </p:sp>
+      <p:sp>
+        <p:nvSpPr>
+          <p:cNvPr id="3" name="Title 2"/>
+          <p:cNvSpPr>
+            <a:spLocks noGrp="1"/>
+          </p:cNvSpPr>
+          <p:nvPr>
+            <p:ph type="title"/>
+          </p:nvPr>
+        </p:nvSpPr>
+        <p:spPr/>
+        <p:txBody>
+          <a:bodyPr/>
+          <a:lstStyle/>
+          <a:p>
+            <a:r>
+              <a:t>Weighted Future Projections by Method</a:t>
+            </a:r>
+          </a:p>
+        </p:txBody>
+      </p:sp>
+      <p:pic>
+        <p:nvPicPr>
+          <p:cNvPr id="4" name="Picture 3" descr="fig_weighting_comparison.png"/>
+          <p:cNvPicPr>
+            <a:picLocks noChangeAspect="1"/>
+          </p:cNvPicPr>
+          <p:nvPr/>
+        </p:nvPicPr>
+        <p:blipFill>
+          <a:blip r:embed="rId2"/>
+          <a:stretch>
+            <a:fillRect/>
+          </a:stretch>
+        </p:blipFill>
+        <p:spPr>
+          <a:xfrm>
+            <a:off x="320040" y="1417320"/>
+            <a:ext cx="6949440" cy="3986540"/>
+          </a:xfrm>
+          <a:prstGeom prst="rect">
+            <a:avLst/>
+          </a:prstGeom>
+        </p:spPr>
+      </p:pic>
+      <p:sp>
+        <p:nvSpPr>
+          <p:cNvPr id="5" name="TextBox 4"/>
+          <p:cNvSpPr txBox="1"/>
+          <p:nvPr/>
+        </p:nvSpPr>
+        <p:spPr>
+          <a:xfrm>
+            <a:off x="7498079" y="1417320"/>
+            <a:ext cx="4434840" cy="4937760"/>
+          </a:xfrm>
+          <a:prstGeom prst="rect">
+            <a:avLst/>
+          </a:prstGeom>
+          <a:noFill/>
+        </p:spPr>
+        <p:txBody>
+          <a:bodyPr wrap="square">
+            <a:spAutoFit/>
+          </a:bodyPr>
+          <a:lstStyle/>
+          <a:p>
+            <a:pPr>
+              <a:spcAft>
+                <a:spcPts val="800"/>
+              </a:spcAft>
+              <a:defRPr sz="1300">
+                <a:solidFill>
+                  <a:srgbClr val="333333"/>
+                </a:solidFill>
+                <a:latin typeface="Arial"/>
+              </a:defRPr>
+            </a:pPr>
+            <a:r>
+              <a:t>Each colour applies a different trained weight set to the SAME SSP5-8.5 ensemble (3 models, LA basin, 2050–2099) — the spread between curves is the structural uncertainty introduced by your weighting choice</a:t>
+            </a:r>
+          </a:p>
+          <a:p>
+            <a:pPr>
+              <a:spcAft>
+                <a:spcPts val="800"/>
+              </a:spcAft>
+              <a:defRPr sz="1300">
+                <a:solidFill>
+                  <a:srgbClr val="333333"/>
+                </a:solidFill>
+                <a:latin typeface="Arial"/>
+              </a:defRPr>
+            </a:pPr>
+            <a:r>
+              <a:t>When weighting methods disagree by ~0.5 °C late-century, that's the ensemble-weighting uncertainty band you'd quote alongside model spread</a:t>
+            </a:r>
+          </a:p>
+          <a:p>
+            <a:pPr>
+              <a:spcAft>
+                <a:spcPts val="800"/>
+              </a:spcAft>
+              <a:defRPr sz="1300">
+                <a:solidFill>
+                  <a:srgbClr val="333333"/>
+                </a:solidFill>
+                <a:latin typeface="Arial"/>
+              </a:defRPr>
+            </a:pPr>
+            <a:r>
+              <a:t>Skill and combined typically tilt the projection toward the model that best reproduces observations; independence damps clustered-model influence</a:t>
+            </a:r>
+          </a:p>
+          <a:p>
+            <a:pPr>
+              <a:spcAft>
+                <a:spcPts val="800"/>
+              </a:spcAft>
+              <a:defRPr sz="1300">
+                <a:solidFill>
+                  <a:srgbClr val="333333"/>
+                </a:solidFill>
+                <a:latin typeface="Arial"/>
+              </a:defRPr>
+            </a:pPr>
+            <a:r>
+              <a:t>All four projections are saved as new dataset_ids — feed any into generate_map / calculate_trend / calculate_time_of_emergence as usual</a:t>
+            </a:r>
+          </a:p>
+        </p:txBody>
+      </p:sp>
+    </p:spTree>
+  </p:cSld>
+  <p:clrMapOvr>
+    <a:masterClrMapping/>
+  </p:clrMapOvr>
+</p:sld>
+</file>
+
+<file path=ppt/slides/slide17.xml><?xml version="1.0" encoding="utf-8"?>
+<p:sld xmlns:a="http://schemas.openxmlformats.org/drawingml/2006/main" xmlns:p="http://schemas.openxmlformats.org/presentationml/2006/main" xmlns:r="http://schemas.openxmlformats.org/officeDocument/2006/relationships">
+  <p:cSld>
+    <p:spTree>
+      <p:nvGrpSpPr>
+        <p:cNvPr id="1" name=""/>
+        <p:cNvGrpSpPr/>
+        <p:nvPr/>
+      </p:nvGrpSpPr>
+      <p:grpSpPr/>
+      <p:sp>
+        <p:nvSpPr>
+          <p:cNvPr id="2" name="Text Placeholder 1"/>
+          <p:cNvSpPr>
+            <a:spLocks noGrp="1"/>
+          </p:cNvSpPr>
+          <p:nvPr>
+            <p:ph type="body" idx="17" sz="quarter"/>
+          </p:nvPr>
+        </p:nvSpPr>
+        <p:spPr/>
+        <p:txBody>
+          <a:bodyPr/>
+          <a:lstStyle/>
+          <a:p>
+            <a:r>
+              <a:t>RCMES-MCP</a:t>
+            </a:r>
+          </a:p>
+        </p:txBody>
+      </p:sp>
+      <p:sp>
+        <p:nvSpPr>
+          <p:cNvPr id="3" name="Title 2"/>
+          <p:cNvSpPr>
+            <a:spLocks noGrp="1"/>
+          </p:cNvSpPr>
+          <p:nvPr>
+            <p:ph type="title"/>
+          </p:nvPr>
+        </p:nvSpPr>
+        <p:spPr/>
+        <p:txBody>
+          <a:bodyPr/>
+          <a:lstStyle/>
+          <a:p>
+            <a:r>
+              <a:t>Probabilistic Scenario Combining</a:t>
+            </a:r>
+          </a:p>
+        </p:txBody>
+      </p:sp>
+      <p:pic>
+        <p:nvPicPr>
+          <p:cNvPr id="4" name="Picture 3" descr="fig_scenario_weighted_combine.png"/>
+          <p:cNvPicPr>
+            <a:picLocks noChangeAspect="1"/>
+          </p:cNvPicPr>
+          <p:nvPr/>
+        </p:nvPicPr>
+        <p:blipFill>
+          <a:blip r:embed="rId2"/>
+          <a:stretch>
+            <a:fillRect/>
+          </a:stretch>
+        </p:blipFill>
+        <p:spPr>
+          <a:xfrm>
+            <a:off x="320040" y="1417320"/>
+            <a:ext cx="6949440" cy="3892253"/>
+          </a:xfrm>
+          <a:prstGeom prst="rect">
+            <a:avLst/>
+          </a:prstGeom>
+        </p:spPr>
+      </p:pic>
+      <p:sp>
+        <p:nvSpPr>
+          <p:cNvPr id="5" name="TextBox 4"/>
+          <p:cNvSpPr txBox="1"/>
+          <p:nvPr/>
+        </p:nvSpPr>
+        <p:spPr>
+          <a:xfrm>
+            <a:off x="7498079" y="1417320"/>
+            <a:ext cx="4434840" cy="4937760"/>
+          </a:xfrm>
+          <a:prstGeom prst="rect">
+            <a:avLst/>
+          </a:prstGeom>
+          <a:noFill/>
+        </p:spPr>
+        <p:txBody>
+          <a:bodyPr wrap="square">
+            <a:spAutoFit/>
+          </a:bodyPr>
+          <a:lstStyle/>
+          <a:p>
+            <a:pPr>
+              <a:spcAft>
+                <a:spcPts val="800"/>
+              </a:spcAft>
+              <a:defRPr sz="1300">
+                <a:solidFill>
+                  <a:srgbClr val="333333"/>
+                </a:solidFill>
+                <a:latin typeface="Arial"/>
+              </a:defRPr>
+            </a:pPr>
+            <a:r>
+              <a:t>combine_scenarios_weighted — assign prior probabilities to each SSP and produce a single weighted-mean projection. Use when the question is "what's the expected warming under our best guess of which pathway society will follow?"</a:t>
+            </a:r>
+          </a:p>
+          <a:p>
+            <a:pPr>
+              <a:spcAft>
+                <a:spcPts val="800"/>
+              </a:spcAft>
+              <a:defRPr sz="1300">
+                <a:solidFill>
+                  <a:srgbClr val="333333"/>
+                </a:solidFill>
+                <a:latin typeface="Arial"/>
+              </a:defRPr>
+            </a:pPr>
+            <a:r>
+              <a:t>Dashed lines: individual SSPs (raw). Solid lines: 4 different policy weight profiles applied to the same 4-scenario set</a:t>
+            </a:r>
+          </a:p>
+          <a:p>
+            <a:pPr>
+              <a:spcAft>
+                <a:spcPts val="800"/>
+              </a:spcAft>
+              <a:defRPr sz="1300">
+                <a:solidFill>
+                  <a:srgbClr val="333333"/>
+                </a:solidFill>
+                <a:latin typeface="Arial"/>
+              </a:defRPr>
+            </a:pPr>
+            <a:r>
+              <a:t>Mitigation-aligned (Paris) puts most weight on ssp126/245; Current-policies favours ssp245/370; High-emissions risk loads ssp585</a:t>
+            </a:r>
+          </a:p>
+          <a:p>
+            <a:pPr>
+              <a:spcAft>
+                <a:spcPts val="800"/>
+              </a:spcAft>
+              <a:defRPr sz="1300">
+                <a:solidFill>
+                  <a:srgbClr val="333333"/>
+                </a:solidFill>
+                <a:latin typeface="Arial"/>
+              </a:defRPr>
+            </a:pPr>
+            <a:r>
+              <a:t>Output is a normal dataset_id — chain into generate_map / generate_timeseries_plot / detect_extreme_events to do downstream analysis on the weighted projection</a:t>
+            </a:r>
+          </a:p>
+        </p:txBody>
+      </p:sp>
+    </p:spTree>
+  </p:cSld>
+  <p:clrMapOvr>
+    <a:masterClrMapping/>
+  </p:clrMapOvr>
+</p:sld>
+</file>
+
+<file path=ppt/slides/slide18.xml><?xml version="1.0" encoding="utf-8"?>
+<p:sld xmlns:a="http://schemas.openxmlformats.org/drawingml/2006/main" xmlns:p="http://schemas.openxmlformats.org/presentationml/2006/main" xmlns:r="http://schemas.openxmlformats.org/officeDocument/2006/relationships">
+  <p:cSld>
+    <p:spTree>
+      <p:nvGrpSpPr>
+        <p:cNvPr id="1" name=""/>
+        <p:cNvGrpSpPr/>
+        <p:nvPr/>
+      </p:nvGrpSpPr>
+      <p:grpSpPr/>
+      <p:sp>
+        <p:nvSpPr>
+          <p:cNvPr id="2" name="Text Placeholder 1"/>
+          <p:cNvSpPr>
+            <a:spLocks noGrp="1"/>
+          </p:cNvSpPr>
+          <p:nvPr>
+            <p:ph type="body" idx="17" sz="quarter"/>
+          </p:nvPr>
+        </p:nvSpPr>
+        <p:spPr/>
+        <p:txBody>
+          <a:bodyPr/>
+          <a:lstStyle/>
+          <a:p>
+            <a:r>
+              <a:t>RCMES-MCP</a:t>
+            </a:r>
+          </a:p>
+        </p:txBody>
+      </p:sp>
+      <p:sp>
+        <p:nvSpPr>
+          <p:cNvPr id="3" name="Title 2"/>
+          <p:cNvSpPr>
+            <a:spLocks noGrp="1"/>
+          </p:cNvSpPr>
+          <p:nvPr>
+            <p:ph type="title"/>
+          </p:nvPr>
+        </p:nvSpPr>
+        <p:spPr/>
+        <p:txBody>
+          <a:bodyPr/>
+          <a:lstStyle/>
+          <a:p>
+            <a:r>
+              <a:t>Model Weighting Across Scenarios</a:t>
+            </a:r>
+          </a:p>
+        </p:txBody>
+      </p:sp>
+      <p:pic>
+        <p:nvPicPr>
+          <p:cNvPr id="4" name="Picture 3" descr="fig_per_scenario_weighting.png"/>
+          <p:cNvPicPr>
+            <a:picLocks noChangeAspect="1"/>
+          </p:cNvPicPr>
+          <p:nvPr/>
+        </p:nvPicPr>
+        <p:blipFill>
+          <a:blip r:embed="rId2"/>
+          <a:stretch>
+            <a:fillRect/>
+          </a:stretch>
+        </p:blipFill>
+        <p:spPr>
+          <a:xfrm>
+            <a:off x="320040" y="1417320"/>
+            <a:ext cx="6949440" cy="2069922"/>
+          </a:xfrm>
+          <a:prstGeom prst="rect">
+            <a:avLst/>
+          </a:prstGeom>
+        </p:spPr>
+      </p:pic>
+      <p:sp>
+        <p:nvSpPr>
+          <p:cNvPr id="5" name="TextBox 4"/>
+          <p:cNvSpPr txBox="1"/>
+          <p:nvPr/>
+        </p:nvSpPr>
+        <p:spPr>
+          <a:xfrm>
+            <a:off x="7498079" y="1417320"/>
+            <a:ext cx="4434840" cy="4937760"/>
+          </a:xfrm>
+          <a:prstGeom prst="rect">
+            <a:avLst/>
+          </a:prstGeom>
+          <a:noFill/>
+        </p:spPr>
+        <p:txBody>
+          <a:bodyPr wrap="square">
+            <a:spAutoFit/>
+          </a:bodyPr>
+          <a:lstStyle/>
+          <a:p>
+            <a:pPr>
+              <a:spcAft>
+                <a:spcPts val="800"/>
+              </a:spcAft>
+              <a:defRPr sz="1300">
+                <a:solidFill>
+                  <a:srgbClr val="333333"/>
+                </a:solidFill>
+                <a:latin typeface="Arial"/>
+              </a:defRPr>
+            </a:pPr>
+            <a:r>
+              <a:t>Same 3-model ensemble + same historically-trained weights, applied to each SSP scenario independently — does weighting shift each scenario's projection in the same way?</a:t>
+            </a:r>
+          </a:p>
+          <a:p>
+            <a:pPr>
+              <a:spcAft>
+                <a:spcPts val="800"/>
+              </a:spcAft>
+              <a:defRPr sz="1300">
+                <a:solidFill>
+                  <a:srgbClr val="333333"/>
+                </a:solidFill>
+                <a:latin typeface="Arial"/>
+              </a:defRPr>
+            </a:pPr>
+            <a:r>
+              <a:t>If the skill-favoured model warms faster than the unweighted mean, weighted projections are higher across ALL scenarios (consistent tilt)</a:t>
+            </a:r>
+          </a:p>
+          <a:p>
+            <a:pPr>
+              <a:spcAft>
+                <a:spcPts val="800"/>
+              </a:spcAft>
+              <a:defRPr sz="1300">
+                <a:solidFill>
+                  <a:srgbClr val="333333"/>
+                </a:solidFill>
+                <a:latin typeface="Arial"/>
+              </a:defRPr>
+            </a:pPr>
+            <a:r>
+              <a:t>Useful diagnostic: lets you carry one trained weight vector through every downstream analysis — no need to re-train per scenario</a:t>
+            </a:r>
+          </a:p>
+          <a:p>
+            <a:pPr>
+              <a:spcAft>
+                <a:spcPts val="800"/>
+              </a:spcAft>
+              <a:defRPr sz="1300">
+                <a:solidFill>
+                  <a:srgbClr val="333333"/>
+                </a:solidFill>
+                <a:latin typeface="Arial"/>
+              </a:defRPr>
+            </a:pPr>
+            <a:r>
+              <a:t>Pair with combine_scenarios_weighted to first weight models within each scenario, then weight scenarios by policy probability</a:t>
+            </a:r>
+          </a:p>
+        </p:txBody>
+      </p:sp>
+    </p:spTree>
+  </p:cSld>
+  <p:clrMapOvr>
+    <a:masterClrMapping/>
+  </p:clrMapOvr>
+</p:sld>
+</file>
+
+<file path=ppt/slides/slide19.xml><?xml version="1.0" encoding="utf-8"?>
+<p:sld xmlns:a="http://schemas.openxmlformats.org/drawingml/2006/main" xmlns:p="http://schemas.openxmlformats.org/presentationml/2006/main" xmlns:r="http://schemas.openxmlformats.org/officeDocument/2006/relationships">
+  <p:cSld>
+    <p:spTree>
+      <p:nvGrpSpPr>
+        <p:cNvPr id="1" name=""/>
+        <p:cNvGrpSpPr/>
+        <p:nvPr/>
+      </p:nvGrpSpPr>
+      <p:grpSpPr/>
+      <p:sp>
+        <p:nvSpPr>
+          <p:cNvPr id="2" name="Text Placeholder 1"/>
+          <p:cNvSpPr>
+            <a:spLocks noGrp="1"/>
+          </p:cNvSpPr>
+          <p:nvPr>
+            <p:ph type="body" idx="17" sz="quarter"/>
+          </p:nvPr>
+        </p:nvSpPr>
+        <p:spPr/>
+        <p:txBody>
+          <a:bodyPr/>
+          <a:lstStyle/>
+          <a:p>
+            <a:r>
+              <a:t>RCMES-MCP</a:t>
+            </a:r>
+          </a:p>
+        </p:txBody>
+      </p:sp>
+      <p:sp>
+        <p:nvSpPr>
+          <p:cNvPr id="3" name="Title 2"/>
+          <p:cNvSpPr>
+            <a:spLocks noGrp="1"/>
+          </p:cNvSpPr>
+          <p:nvPr>
+            <p:ph type="title"/>
+          </p:nvPr>
+        </p:nvSpPr>
+        <p:spPr/>
+        <p:txBody>
+          <a:bodyPr/>
+          <a:lstStyle/>
+          <a:p>
+            <a:r>
+              <a:t>Current Status</a:t>
+            </a:r>
+          </a:p>
+        </p:txBody>
+      </p:sp>
+      <p:sp>
+        <p:nvSpPr>
+          <p:cNvPr id="4" name="Text Placeholder 3"/>
+          <p:cNvSpPr>
+            <a:spLocks noGrp="1"/>
+          </p:cNvSpPr>
+          <p:nvPr>
+            <p:ph type="body" idx="14" sz="quarter"/>
+          </p:nvPr>
+        </p:nvSpPr>
+        <p:spPr/>
+        <p:txBody>
+          <a:bodyPr/>
+          <a:lstStyle/>
+          <a:p/>
+        </p:txBody>
+      </p:sp>
+      <p:sp>
+        <p:nvSpPr>
+          <p:cNvPr id="5" name="Content Placeholder 4"/>
+          <p:cNvSpPr>
+            <a:spLocks noGrp="1"/>
+          </p:cNvSpPr>
+          <p:nvPr>
+            <p:ph idx="19" sz="quarter"/>
+          </p:nvPr>
+        </p:nvSpPr>
+        <p:spPr/>
+        <p:txBody>
+          <a:bodyPr/>
+          <a:lstStyle/>
+          <a:p>
+            <a:pPr>
+              <a:defRPr sz="1400" b="1">
+                <a:solidFill>
+                  <a:srgbClr val="00325B"/>
+                </a:solidFill>
+                <a:latin typeface="Arial"/>
+              </a:defRPr>
+            </a:pPr>
+            <a:r>
+              <a:t>Accomplishments</a:t>
+            </a:r>
+          </a:p>
+          <a:p>
+            <a:pPr>
+              <a:spcAft>
+                <a:spcPts val="300"/>
+              </a:spcAft>
+              <a:defRPr sz="1100">
+                <a:solidFill>
+                  <a:srgbClr val="333333"/>
+                </a:solidFill>
+                <a:latin typeface="Arial"/>
+              </a:defRPr>
+            </a:pPr>
+            <a:r>
+              <a:t>32+ MCP tools: full climate analysis pipeline</a:t>
+            </a:r>
+          </a:p>
+          <a:p>
+            <a:pPr>
+              <a:spcAft>
+                <a:spcPts val="300"/>
+              </a:spcAft>
+              <a:defRPr sz="1100">
+                <a:solidFill>
+                  <a:srgbClr val="333333"/>
+                </a:solidFill>
+                <a:latin typeface="Arial"/>
+              </a:defRPr>
+            </a:pPr>
+            <a:r>
+              <a:t>Operational 38 TB data access via AWS S3</a:t>
+            </a:r>
+          </a:p>
+          <a:p>
+            <a:pPr>
+              <a:spcAft>
+                <a:spcPts val="300"/>
+              </a:spcAft>
+              <a:defRPr sz="1100">
+                <a:solidFill>
+                  <a:srgbClr val="333333"/>
+                </a:solidFill>
+                <a:latin typeface="Arial"/>
+              </a:defRPr>
+            </a:pPr>
+            <a:r>
+              <a:t>22 ETCCDI extreme climate indices</a:t>
+            </a:r>
+          </a:p>
+          <a:p>
+            <a:pPr>
+              <a:spcAft>
+                <a:spcPts val="300"/>
+              </a:spcAft>
+              <a:defRPr sz="1100">
+                <a:solidFill>
+                  <a:srgbClr val="333333"/>
+                </a:solidFill>
+                <a:latin typeface="Arial"/>
+              </a:defRPr>
+            </a:pPr>
+            <a:r>
+              <a:t>Interactive web UI (React + FastAPI)</a:t>
+            </a:r>
+          </a:p>
+          <a:p>
+            <a:pPr>
+              <a:spcAft>
+                <a:spcPts val="300"/>
+              </a:spcAft>
+              <a:defRPr sz="1100">
+                <a:solidFill>
+                  <a:srgbClr val="333333"/>
+                </a:solidFill>
+                <a:latin typeface="Arial"/>
+              </a:defRPr>
+            </a:pPr>
+            <a:r>
+              <a:t>Multiple deployment modes (MCP, Web, API, Docker)</a:t>
+            </a:r>
+          </a:p>
+          <a:p>
+            <a:pPr>
+              <a:spcAft>
+                <a:spcPts val="300"/>
+              </a:spcAft>
+              <a:defRPr sz="1100">
+                <a:solidFill>
+                  <a:srgbClr val="333333"/>
+                </a:solidFill>
+                <a:latin typeface="Arial"/>
+              </a:defRPr>
+            </a:pPr>
+            <a:r>
+              <a:t>Session management with chainable operations</a:t>
+            </a:r>
+          </a:p>
+          <a:p>
+            <a:pPr>
+              <a:spcAft>
+                <a:spcPts val="300"/>
+              </a:spcAft>
+              <a:defRPr sz="1100">
+                <a:solidFill>
+                  <a:srgbClr val="333333"/>
+                </a:solidFill>
+                <a:latin typeface="Arial"/>
+              </a:defRPr>
+            </a:pPr>
+            <a:r>
+              <a:t>Country-level masking &amp; geographic selection</a:t>
+            </a:r>
+          </a:p>
+        </p:txBody>
+      </p:sp>
+      <p:sp>
+        <p:nvSpPr>
+          <p:cNvPr id="6" name="Content Placeholder 5"/>
+          <p:cNvSpPr>
+            <a:spLocks noGrp="1"/>
+          </p:cNvSpPr>
+          <p:nvPr>
+            <p:ph idx="20" sz="quarter"/>
+          </p:nvPr>
+        </p:nvSpPr>
+        <p:spPr/>
+        <p:txBody>
+          <a:bodyPr/>
+          <a:lstStyle/>
+          <a:p>
+            <a:pPr>
+              <a:defRPr sz="1400" b="1">
+                <a:solidFill>
+                  <a:srgbClr val="00325B"/>
+                </a:solidFill>
+                <a:latin typeface="Arial"/>
+              </a:defRPr>
+            </a:pPr>
+            <a:r>
+              <a:t>Technology Stack</a:t>
+            </a:r>
+          </a:p>
+          <a:p>
+            <a:pPr>
+              <a:spcAft>
+                <a:spcPts val="300"/>
+              </a:spcAft>
+            </a:pPr>
+            <a:r>
+              <a:rPr sz="1100" b="1">
+                <a:solidFill>
+                  <a:srgbClr val="007DBA"/>
+                </a:solidFill>
+                <a:latin typeface="Arial"/>
+              </a:rPr>
+              <a:t>Core: </a:t>
+            </a:r>
+            <a:r>
+              <a:rPr sz="1100">
+                <a:solidFill>
+                  <a:srgbClr val="333333"/>
+                </a:solidFill>
+                <a:latin typeface="Arial"/>
+              </a:rPr>
+              <a:t>Python 3.10+, xarray, Dask, zarr</a:t>
+            </a:r>
+          </a:p>
+          <a:p>
+            <a:pPr>
+              <a:spcAft>
+                <a:spcPts val="300"/>
+              </a:spcAft>
+            </a:pPr>
+            <a:r>
+              <a:rPr sz="1100" b="1">
+                <a:solidFill>
+                  <a:srgbClr val="007DBA"/>
+                </a:solidFill>
+                <a:latin typeface="Arial"/>
+              </a:rPr>
+              <a:t>Climate: </a:t>
+            </a:r>
+            <a:r>
+              <a:rPr sz="1100">
+                <a:solidFill>
+                  <a:srgbClr val="333333"/>
+                </a:solidFill>
+                <a:latin typeface="Arial"/>
+              </a:rPr>
+              <a:t>xclim, SciPy, NetCDF4</a:t>
+            </a:r>
+          </a:p>
+          <a:p>
+            <a:pPr>
+              <a:spcAft>
+                <a:spcPts val="300"/>
+              </a:spcAft>
+            </a:pPr>
+            <a:r>
+              <a:rPr sz="1100" b="1">
+                <a:solidFill>
+                  <a:srgbClr val="007DBA"/>
+                </a:solidFill>
+                <a:latin typeface="Arial"/>
+              </a:rPr>
+              <a:t>Geospatial: </a:t>
+            </a:r>
+            <a:r>
+              <a:rPr sz="1100">
+                <a:solidFill>
+                  <a:srgbClr val="333333"/>
+                </a:solidFill>
+                <a:latin typeface="Arial"/>
+              </a:rPr>
+              <a:t>Shapely, GeoPandas, Cartopy</a:t>
+            </a:r>
+          </a:p>
+          <a:p>
+            <a:pPr>
+              <a:spcAft>
+                <a:spcPts val="300"/>
+              </a:spcAft>
+            </a:pPr>
+            <a:r>
+              <a:rPr sz="1100" b="1">
+                <a:solidFill>
+                  <a:srgbClr val="007DBA"/>
+                </a:solidFill>
+                <a:latin typeface="Arial"/>
+              </a:rPr>
+              <a:t>Server: </a:t>
+            </a:r>
+            <a:r>
+              <a:rPr sz="1100">
+                <a:solidFill>
+                  <a:srgbClr val="333333"/>
+                </a:solidFill>
+                <a:latin typeface="Arial"/>
+              </a:rPr>
+              <a:t>FastMCP, FastAPI, Uvicorn</a:t>
+            </a:r>
+          </a:p>
+          <a:p>
+            <a:pPr>
+              <a:spcAft>
+                <a:spcPts val="300"/>
+              </a:spcAft>
+            </a:pPr>
+            <a:r>
+              <a:rPr sz="1100" b="1">
+                <a:solidFill>
+                  <a:srgbClr val="007DBA"/>
+                </a:solidFill>
+                <a:latin typeface="Arial"/>
+              </a:rPr>
+              <a:t>Frontend: </a:t>
+            </a:r>
+            <a:r>
+              <a:rPr sz="1100">
+                <a:solidFill>
+                  <a:srgbClr val="333333"/>
+                </a:solidFill>
+                <a:latin typeface="Arial"/>
+              </a:rPr>
+              <a:t>React, TypeScript</a:t>
+            </a:r>
+          </a:p>
+          <a:p>
+            <a:pPr>
+              <a:spcAft>
+                <a:spcPts val="300"/>
+              </a:spcAft>
+            </a:pPr>
+            <a:r>
+              <a:rPr sz="1100" b="1">
+                <a:solidFill>
+                  <a:srgbClr val="007DBA"/>
+                </a:solidFill>
+                <a:latin typeface="Arial"/>
+              </a:rPr>
+              <a:t>Data: </a:t>
+            </a:r>
+            <a:r>
+              <a:rPr sz="1100">
+                <a:solidFill>
+                  <a:srgbClr val="333333"/>
+                </a:solidFill>
+                <a:latin typeface="Arial"/>
+              </a:rPr>
+              <a:t>AWS S3, NEX-GDDP-CMIP6</a:t>
+            </a:r>
+          </a:p>
+          <a:p>
+            <a:pPr>
+              <a:spcAft>
+                <a:spcPts val="300"/>
+              </a:spcAft>
+            </a:pPr>
+            <a:r>
+              <a:rPr sz="1100" b="1">
+                <a:solidFill>
+                  <a:srgbClr val="007DBA"/>
+                </a:solidFill>
+                <a:latin typeface="Arial"/>
+              </a:rPr>
+              <a:t>AI: </a:t>
+            </a:r>
+            <a:r>
+              <a:rPr sz="1100">
+                <a:solidFill>
+                  <a:srgbClr val="333333"/>
+                </a:solidFill>
+                <a:latin typeface="Arial"/>
+              </a:rPr>
+              <a:t>MCP Protocol, Azure OpenAI</a:t>
+            </a:r>
+          </a:p>
+        </p:txBody>
+      </p:sp>
     </p:spTree>
   </p:cSld>
   <p:clrMapOvr>
@@ -18259,6 +18743,351 @@
 </p:sld>
 </file>
 
+<file path=ppt/slides/slide20.xml><?xml version="1.0" encoding="utf-8"?>
+<p:sld xmlns:a="http://schemas.openxmlformats.org/drawingml/2006/main" xmlns:p="http://schemas.openxmlformats.org/presentationml/2006/main" xmlns:r="http://schemas.openxmlformats.org/officeDocument/2006/relationships">
+  <p:cSld>
+    <p:spTree>
+      <p:nvGrpSpPr>
+        <p:cNvPr id="1" name=""/>
+        <p:cNvGrpSpPr/>
+        <p:nvPr/>
+      </p:nvGrpSpPr>
+      <p:grpSpPr/>
+      <p:sp>
+        <p:nvSpPr>
+          <p:cNvPr id="2" name="Text Placeholder 1"/>
+          <p:cNvSpPr>
+            <a:spLocks noGrp="1"/>
+          </p:cNvSpPr>
+          <p:nvPr>
+            <p:ph type="body" idx="17" sz="quarter"/>
+          </p:nvPr>
+        </p:nvSpPr>
+        <p:spPr/>
+        <p:txBody>
+          <a:bodyPr/>
+          <a:lstStyle/>
+          <a:p>
+            <a:r>
+              <a:t>RCMES-MCP</a:t>
+            </a:r>
+          </a:p>
+        </p:txBody>
+      </p:sp>
+      <p:sp>
+        <p:nvSpPr>
+          <p:cNvPr id="3" name="Title 2"/>
+          <p:cNvSpPr>
+            <a:spLocks noGrp="1"/>
+          </p:cNvSpPr>
+          <p:nvPr>
+            <p:ph type="title"/>
+          </p:nvPr>
+        </p:nvSpPr>
+        <p:spPr/>
+        <p:txBody>
+          <a:bodyPr/>
+          <a:lstStyle/>
+          <a:p>
+            <a:r>
+              <a:t>Path Forward &amp; Continued Support</a:t>
+            </a:r>
+          </a:p>
+        </p:txBody>
+      </p:sp>
+      <p:sp>
+        <p:nvSpPr>
+          <p:cNvPr id="4" name="Text Placeholder 3"/>
+          <p:cNvSpPr>
+            <a:spLocks noGrp="1"/>
+          </p:cNvSpPr>
+          <p:nvPr>
+            <p:ph type="body" idx="14" sz="quarter"/>
+          </p:nvPr>
+        </p:nvSpPr>
+        <p:spPr/>
+        <p:txBody>
+          <a:bodyPr/>
+          <a:lstStyle/>
+          <a:p/>
+        </p:txBody>
+      </p:sp>
+      <p:sp>
+        <p:nvSpPr>
+          <p:cNvPr id="5" name="Content Placeholder 4"/>
+          <p:cNvSpPr>
+            <a:spLocks noGrp="1"/>
+          </p:cNvSpPr>
+          <p:nvPr>
+            <p:ph idx="19" sz="quarter"/>
+          </p:nvPr>
+        </p:nvSpPr>
+        <p:spPr/>
+        <p:txBody>
+          <a:bodyPr/>
+          <a:lstStyle/>
+          <a:p>
+            <a:pPr>
+              <a:defRPr sz="1400" b="1">
+                <a:solidFill>
+                  <a:srgbClr val="00325B"/>
+                </a:solidFill>
+                <a:latin typeface="Arial"/>
+              </a:defRPr>
+            </a:pPr>
+            <a:r>
+              <a:t>Growth Opportunities</a:t>
+            </a:r>
+          </a:p>
+          <a:p>
+            <a:pPr>
+              <a:spcAft>
+                <a:spcPts val="300"/>
+              </a:spcAft>
+              <a:defRPr sz="1100">
+                <a:solidFill>
+                  <a:srgbClr val="333333"/>
+                </a:solidFill>
+                <a:latin typeface="Arial"/>
+              </a:defRPr>
+            </a:pPr>
+            <a:r>
+              <a:t>Expand to additional NASA datasets (MERRA-2, ECCO, GLDAS)</a:t>
+            </a:r>
+          </a:p>
+          <a:p>
+            <a:pPr>
+              <a:spcAft>
+                <a:spcPts val="300"/>
+              </a:spcAft>
+              <a:defRPr sz="1100">
+                <a:solidFill>
+                  <a:srgbClr val="333333"/>
+                </a:solidFill>
+                <a:latin typeface="Arial"/>
+              </a:defRPr>
+            </a:pPr>
+            <a:r>
+              <a:t>Model evaluation with observational datasets</a:t>
+            </a:r>
+          </a:p>
+          <a:p>
+            <a:pPr>
+              <a:spcAft>
+                <a:spcPts val="300"/>
+              </a:spcAft>
+              <a:defRPr sz="1100">
+                <a:solidFill>
+                  <a:srgbClr val="333333"/>
+                </a:solidFill>
+                <a:latin typeface="Arial"/>
+              </a:defRPr>
+            </a:pPr>
+            <a:r>
+              <a:t>NASA Earthdata integration for authenticated access</a:t>
+            </a:r>
+          </a:p>
+          <a:p>
+            <a:pPr>
+              <a:spcAft>
+                <a:spcPts val="300"/>
+              </a:spcAft>
+              <a:defRPr sz="1100">
+                <a:solidFill>
+                  <a:srgbClr val="333333"/>
+                </a:solidFill>
+                <a:latin typeface="Arial"/>
+              </a:defRPr>
+            </a:pPr>
+            <a:r>
+              <a:t>Multi-model ensemble analysis &amp; weighting</a:t>
+            </a:r>
+          </a:p>
+          <a:p>
+            <a:pPr>
+              <a:spcAft>
+                <a:spcPts val="300"/>
+              </a:spcAft>
+              <a:defRPr sz="1100">
+                <a:solidFill>
+                  <a:srgbClr val="333333"/>
+                </a:solidFill>
+                <a:latin typeface="Arial"/>
+              </a:defRPr>
+            </a:pPr>
+            <a:r>
+              <a:t>Community tool for broader climate science use</a:t>
+            </a:r>
+          </a:p>
+          <a:p>
+            <a:pPr>
+              <a:spcAft>
+                <a:spcPts val="300"/>
+              </a:spcAft>
+              <a:defRPr sz="1100">
+                <a:solidFill>
+                  <a:srgbClr val="333333"/>
+                </a:solidFill>
+                <a:latin typeface="Arial"/>
+              </a:defRPr>
+            </a:pPr>
+            <a:r>
+              <a:t>Reproducible climate assessments for policy support</a:t>
+            </a:r>
+          </a:p>
+        </p:txBody>
+      </p:sp>
+      <p:sp>
+        <p:nvSpPr>
+          <p:cNvPr id="6" name="Content Placeholder 5"/>
+          <p:cNvSpPr>
+            <a:spLocks noGrp="1"/>
+          </p:cNvSpPr>
+          <p:nvPr>
+            <p:ph idx="20" sz="quarter"/>
+          </p:nvPr>
+        </p:nvSpPr>
+        <p:spPr/>
+        <p:txBody>
+          <a:bodyPr/>
+          <a:lstStyle/>
+          <a:p>
+            <a:pPr>
+              <a:defRPr sz="1400" b="1">
+                <a:solidFill>
+                  <a:srgbClr val="00325B"/>
+                </a:solidFill>
+                <a:latin typeface="Arial"/>
+              </a:defRPr>
+            </a:pPr>
+            <a:r>
+              <a:t>What Continued Support Enables</a:t>
+            </a:r>
+          </a:p>
+          <a:p>
+            <a:pPr>
+              <a:spcAft>
+                <a:spcPts val="300"/>
+              </a:spcAft>
+              <a:defRPr sz="1100">
+                <a:solidFill>
+                  <a:srgbClr val="333333"/>
+                </a:solidFill>
+                <a:latin typeface="Arial"/>
+              </a:defRPr>
+            </a:pPr>
+            <a:r>
+              <a:t>Democratize access to NASA climate data for non-experts</a:t>
+            </a:r>
+          </a:p>
+          <a:p>
+            <a:pPr>
+              <a:spcAft>
+                <a:spcPts val="300"/>
+              </a:spcAft>
+              <a:defRPr sz="1100">
+                <a:solidFill>
+                  <a:srgbClr val="333333"/>
+                </a:solidFill>
+                <a:latin typeface="Arial"/>
+              </a:defRPr>
+            </a:pPr>
+            <a:r>
+              <a:t>Accelerate climate research by removing data engineering bottlenecks</a:t>
+            </a:r>
+          </a:p>
+          <a:p>
+            <a:pPr>
+              <a:spcAft>
+                <a:spcPts val="300"/>
+              </a:spcAft>
+              <a:defRPr sz="1100">
+                <a:solidFill>
+                  <a:srgbClr val="333333"/>
+                </a:solidFill>
+                <a:latin typeface="Arial"/>
+              </a:defRPr>
+            </a:pPr>
+            <a:r>
+              <a:t>Enable rapid AI-assisted climate impact assessments</a:t>
+            </a:r>
+          </a:p>
+          <a:p>
+            <a:pPr>
+              <a:spcAft>
+                <a:spcPts val="300"/>
+              </a:spcAft>
+              <a:defRPr sz="1100">
+                <a:solidFill>
+                  <a:srgbClr val="333333"/>
+                </a:solidFill>
+                <a:latin typeface="Arial"/>
+              </a:defRPr>
+            </a:pPr>
+            <a:r>
+              <a:t>Lower the barrier to entry across disciplines</a:t>
+            </a:r>
+          </a:p>
+          <a:p>
+            <a:pPr>
+              <a:spcAft>
+                <a:spcPts val="300"/>
+              </a:spcAft>
+              <a:defRPr sz="1100">
+                <a:solidFill>
+                  <a:srgbClr val="333333"/>
+                </a:solidFill>
+                <a:latin typeface="Arial"/>
+              </a:defRPr>
+            </a:pPr>
+            <a:r>
+              <a:t>Position NASA JPL at the forefront of AI-enabled science</a:t>
+            </a:r>
+          </a:p>
+          <a:p>
+            <a:pPr>
+              <a:spcAft>
+                <a:spcPts val="300"/>
+              </a:spcAft>
+              <a:defRPr sz="1100">
+                <a:solidFill>
+                  <a:srgbClr val="333333"/>
+                </a:solidFill>
+                <a:latin typeface="Arial"/>
+              </a:defRPr>
+            </a:pPr>
+            <a:r>
+              <a:t>Support decision-makers with actionable climate intelligence</a:t>
+            </a:r>
+          </a:p>
+        </p:txBody>
+      </p:sp>
+    </p:spTree>
+  </p:cSld>
+  <p:clrMapOvr>
+    <a:masterClrMapping/>
+  </p:clrMapOvr>
+</p:sld>
+</file>
+
+<file path=ppt/slides/slide21.xml><?xml version="1.0" encoding="utf-8"?>
+<p:sld xmlns:a="http://schemas.openxmlformats.org/drawingml/2006/main" xmlns:p="http://schemas.openxmlformats.org/presentationml/2006/main" xmlns:r="http://schemas.openxmlformats.org/officeDocument/2006/relationships">
+  <p:cSld>
+    <p:spTree>
+      <p:nvGrpSpPr>
+        <p:cNvPr id="1" name=""/>
+        <p:cNvGrpSpPr/>
+        <p:nvPr/>
+      </p:nvGrpSpPr>
+      <p:grpSpPr/>
+    </p:spTree>
+  </p:cSld>
+  <p:clrMapOvr>
+    <a:masterClrMapping/>
+  </p:clrMapOvr>
+</p:sld>
+</file>
+
 <file path=ppt/slides/slide3.xml><?xml version="1.0" encoding="utf-8"?>
 <p:sld xmlns:a="http://schemas.openxmlformats.org/drawingml/2006/main" xmlns:p="http://schemas.openxmlformats.org/presentationml/2006/main" xmlns:r="http://schemas.openxmlformats.org/officeDocument/2006/relationships">
   <p:cSld>
@@ -18595,7 +19424,7 @@
           <a:lstStyle/>
           <a:p>
             <a:r>
-              <a:t>42+ Climate Analysis Tools</a:t>
+              <a:t>47+ Climate Analysis Tools</a:t>
             </a:r>
           </a:p>
         </p:txBody>
@@ -18692,6 +19521,22 @@
             </a:pPr>
             <a:r>
               <a:t>Ensemble &amp; Scenario — Multi-model statistics with IPCC-style agreement maps, scenario-comparison fan charts</a:t>
+            </a:r>
+          </a:p>
+          <a:p>
+            <a:pPr>
+              <a:spcAft>
+                <a:spcPts val="600"/>
+              </a:spcAft>
+              <a:defRPr sz="1300">
+                <a:solidFill>
+                  <a:srgbClr val="333333"/>
+                </a:solidFill>
+                <a:latin typeface="Arial"/>
+              </a:defRPr>
+            </a:pPr>
+            <a:r>
+              <a:t>Ensemble Weighting — Skill / independence / combined weighting (Knutti 2017) validated against NCEP reanalysis observations</a:t>
             </a:r>
           </a:p>
           <a:p>
